--- a/Stroke.pptx
+++ b/Stroke.pptx
@@ -32,7 +32,10 @@
     <p:sldId id="280" r:id="rId26"/>
     <p:sldId id="282" r:id="rId27"/>
     <p:sldId id="283" r:id="rId28"/>
-    <p:sldId id="278" r:id="rId29"/>
+    <p:sldId id="284" r:id="rId29"/>
+    <p:sldId id="285" r:id="rId30"/>
+    <p:sldId id="286" r:id="rId31"/>
+    <p:sldId id="278" r:id="rId32"/>
   </p:sldIdLst>
   <p:sldSz cx="12192000" cy="6858000"/>
   <p:notesSz cx="6858000" cy="9144000"/>
@@ -7044,15 +7047,55 @@
             <p:ph idx="1"/>
           </p:nvPr>
         </p:nvSpPr>
-        <p:spPr/>
-        <p:txBody>
-          <a:bodyPr/>
+        <p:spPr>
+          <a:xfrm>
+            <a:off x="1371600" y="2286000"/>
+            <a:ext cx="3820510" cy="3581400"/>
+          </a:xfrm>
+        </p:spPr>
+        <p:txBody>
+          <a:bodyPr>
+            <a:normAutofit/>
+          </a:bodyPr>
           <a:lstStyle/>
           <a:p>
-            <a:endParaRPr lang="pl-PL"/>
-          </a:p>
-        </p:txBody>
-      </p:sp>
+            <a:r>
+              <a:rPr lang="pl-PL" sz="2200" dirty="0"/>
+              <a:t>Największą różnicę w zysku biznesowym widać w przypadku regresji logistycznej, która nie dość, że zwiększyła swój wynik, to okazała się najopłacalniejszym modelem</a:t>
+            </a:r>
+          </a:p>
+        </p:txBody>
+      </p:sp>
+      <p:pic>
+        <p:nvPicPr>
+          <p:cNvPr id="4" name="Obraz 3">
+            <a:extLst>
+              <a:ext uri="{FF2B5EF4-FFF2-40B4-BE49-F238E27FC236}">
+                <a16:creationId xmlns:a16="http://schemas.microsoft.com/office/drawing/2014/main" id="{9013A8F5-8908-D9BE-EB7A-2B7BA4A7F02C}"/>
+              </a:ext>
+            </a:extLst>
+          </p:cNvPr>
+          <p:cNvPicPr>
+            <a:picLocks noChangeAspect="1"/>
+          </p:cNvPicPr>
+          <p:nvPr/>
+        </p:nvPicPr>
+        <p:blipFill>
+          <a:blip r:embed="rId2"/>
+          <a:stretch>
+            <a:fillRect/>
+          </a:stretch>
+        </p:blipFill>
+        <p:spPr>
+          <a:xfrm>
+            <a:off x="5707116" y="2200274"/>
+            <a:ext cx="6273997" cy="3752851"/>
+          </a:xfrm>
+          <a:prstGeom prst="rect">
+            <a:avLst/>
+          </a:prstGeom>
+        </p:spPr>
+      </p:pic>
     </p:spTree>
     <p:extLst>
       <p:ext uri="{BB962C8B-B14F-4D97-AF65-F5344CB8AC3E}">
@@ -7085,10 +7128,10 @@
       </p:grpSpPr>
       <p:sp>
         <p:nvSpPr>
-          <p:cNvPr id="2" name="Tytuł 1">
+          <p:cNvPr id="3" name="Symbol zastępczy zawartości 2">
             <a:extLst>
               <a:ext uri="{FF2B5EF4-FFF2-40B4-BE49-F238E27FC236}">
-                <a16:creationId xmlns:a16="http://schemas.microsoft.com/office/drawing/2014/main" id="{EB34EFEF-37A9-DB75-FC29-22E6183FD802}"/>
+                <a16:creationId xmlns:a16="http://schemas.microsoft.com/office/drawing/2014/main" id="{5F3A50C6-7D6E-9D5D-F99A-E445951F1D14}"/>
               </a:ext>
             </a:extLst>
           </p:cNvPr>
@@ -7096,27 +7139,109 @@
             <a:spLocks noGrp="1"/>
           </p:cNvSpPr>
           <p:nvPr>
-            <p:ph type="title"/>
-          </p:nvPr>
-        </p:nvSpPr>
-        <p:spPr/>
+            <p:ph idx="1"/>
+          </p:nvPr>
+        </p:nvSpPr>
+        <p:spPr>
+          <a:xfrm>
+            <a:off x="1371600" y="331076"/>
+            <a:ext cx="9601200" cy="3581400"/>
+          </a:xfrm>
+        </p:spPr>
         <p:txBody>
           <a:bodyPr/>
           <a:lstStyle/>
           <a:p>
             <a:r>
               <a:rPr lang="pl-PL" dirty="0"/>
-              <a:t>Podział prac</a:t>
-            </a:r>
-          </a:p>
-        </p:txBody>
-      </p:sp>
+              <a:t>W przypadku F2-Score największą różnicę widać dla Drzewa Decyzyjnego. Optymalizacja (zwłaszcza dodanie kary za przeoczenie zawału – </a:t>
+            </a:r>
+            <a:r>
+              <a:rPr lang="pl-PL" dirty="0" err="1"/>
+              <a:t>class_weight</a:t>
+            </a:r>
+            <a:r>
+              <a:rPr lang="pl-PL" dirty="0"/>
+              <a:t>) brutalnie wymusiła na drzewie skupienie się na chorych. Model zaczął aktywnie szukać zawałów i je wyłapywać.</a:t>
+            </a:r>
+          </a:p>
+          <a:p>
+            <a:r>
+              <a:rPr lang="pl-PL" dirty="0"/>
+              <a:t>Mimo, że F2-Score był bardzo wysoki dla Regresji Logistycznej, to zysk był ujemny, więc model uznawał większość osób za chore dlatego optymalizacja doprowadziła do jego obniżenia</a:t>
+            </a:r>
+          </a:p>
+          <a:p>
+            <a:endParaRPr lang="pl-PL" dirty="0"/>
+          </a:p>
+        </p:txBody>
+      </p:sp>
+      <p:pic>
+        <p:nvPicPr>
+          <p:cNvPr id="4" name="Obraz 3">
+            <a:extLst>
+              <a:ext uri="{FF2B5EF4-FFF2-40B4-BE49-F238E27FC236}">
+                <a16:creationId xmlns:a16="http://schemas.microsoft.com/office/drawing/2014/main" id="{8EE94F74-98B5-7A84-495D-4C16FBCE7320}"/>
+              </a:ext>
+            </a:extLst>
+          </p:cNvPr>
+          <p:cNvPicPr>
+            <a:picLocks noChangeAspect="1"/>
+          </p:cNvPicPr>
+          <p:nvPr/>
+        </p:nvPicPr>
+        <p:blipFill>
+          <a:blip r:embed="rId2"/>
+          <a:stretch>
+            <a:fillRect/>
+          </a:stretch>
+        </p:blipFill>
+        <p:spPr>
+          <a:xfrm>
+            <a:off x="2622550" y="2858814"/>
+            <a:ext cx="6260754" cy="3668110"/>
+          </a:xfrm>
+          <a:prstGeom prst="rect">
+            <a:avLst/>
+          </a:prstGeom>
+        </p:spPr>
+      </p:pic>
+    </p:spTree>
+    <p:extLst>
+      <p:ext uri="{BB962C8B-B14F-4D97-AF65-F5344CB8AC3E}">
+        <p14:creationId xmlns:p14="http://schemas.microsoft.com/office/powerpoint/2010/main" val="2452927235"/>
+      </p:ext>
+    </p:extLst>
+  </p:cSld>
+  <p:clrMapOvr>
+    <a:masterClrMapping/>
+  </p:clrMapOvr>
+</p:sld>
+</file>
+
+<file path=ppt/slides/slide29.xml><?xml version="1.0" encoding="utf-8"?>
+<p:sld xmlns:a="http://schemas.openxmlformats.org/drawingml/2006/main" xmlns:r="http://schemas.openxmlformats.org/officeDocument/2006/relationships" xmlns:p="http://schemas.openxmlformats.org/presentationml/2006/main">
+  <p:cSld>
+    <p:spTree>
+      <p:nvGrpSpPr>
+        <p:cNvPr id="1" name=""/>
+        <p:cNvGrpSpPr/>
+        <p:nvPr/>
+      </p:nvGrpSpPr>
+      <p:grpSpPr>
+        <a:xfrm>
+          <a:off x="0" y="0"/>
+          <a:ext cx="0" cy="0"/>
+          <a:chOff x="0" y="0"/>
+          <a:chExt cx="0" cy="0"/>
+        </a:xfrm>
+      </p:grpSpPr>
       <p:sp>
         <p:nvSpPr>
           <p:cNvPr id="3" name="Symbol zastępczy zawartości 2">
             <a:extLst>
               <a:ext uri="{FF2B5EF4-FFF2-40B4-BE49-F238E27FC236}">
-                <a16:creationId xmlns:a16="http://schemas.microsoft.com/office/drawing/2014/main" id="{B6BADEC5-2F02-12F7-EF39-2DF2BCAB6CC7}"/>
+                <a16:creationId xmlns:a16="http://schemas.microsoft.com/office/drawing/2014/main" id="{66349E7D-7F6F-453D-29EB-24F349ABFE37}"/>
               </a:ext>
             </a:extLst>
           </p:cNvPr>
@@ -7127,7 +7252,12 @@
             <p:ph idx="1"/>
           </p:nvPr>
         </p:nvSpPr>
-        <p:spPr/>
+        <p:spPr>
+          <a:xfrm>
+            <a:off x="1295400" y="383628"/>
+            <a:ext cx="4716518" cy="5764924"/>
+          </a:xfrm>
+        </p:spPr>
         <p:txBody>
           <a:bodyPr>
             <a:normAutofit/>
@@ -7135,50 +7265,93 @@
           <a:lstStyle/>
           <a:p>
             <a:r>
-              <a:rPr lang="pl-PL" sz="2400" dirty="0"/>
-              <a:t>Czesław Komenda – Regresja Logistyczna, prezentacja, interpretacja wyników</a:t>
-            </a:r>
-          </a:p>
-          <a:p>
-            <a:endParaRPr lang="pl-PL" sz="2400" dirty="0"/>
-          </a:p>
-          <a:p>
-            <a:r>
-              <a:rPr lang="pl-PL" sz="2400" dirty="0"/>
-              <a:t>Michał </a:t>
-            </a:r>
-            <a:r>
-              <a:rPr lang="pl-PL" sz="2400" dirty="0" err="1"/>
-              <a:t>Iwanejko</a:t>
-            </a:r>
-            <a:r>
-              <a:rPr lang="pl-PL" sz="2400" dirty="0"/>
-              <a:t> – Drzewo decyzyjne, analiza i </a:t>
-            </a:r>
-            <a:r>
-              <a:rPr lang="pl-PL" sz="2400" dirty="0" err="1"/>
-              <a:t>preprocesing</a:t>
-            </a:r>
-            <a:r>
-              <a:rPr lang="pl-PL" sz="2400" dirty="0"/>
-              <a:t> zbioru danych</a:t>
-            </a:r>
-          </a:p>
-          <a:p>
-            <a:endParaRPr lang="pl-PL" sz="2400" dirty="0"/>
-          </a:p>
-          <a:p>
-            <a:r>
-              <a:rPr lang="pl-PL" sz="2400" dirty="0"/>
-              <a:t>Ignacy Rusiecki – SVM, wybór i uzasadnienie miar klasyfikacji</a:t>
-            </a:r>
-          </a:p>
-        </p:txBody>
-      </p:sp>
+              <a:rPr lang="pl-PL" dirty="0"/>
+              <a:t>Dla Drzewa Decyzyjnego i SVM widać duży wzrost w wynikach. Po zastosowaniu </a:t>
+            </a:r>
+            <a:r>
+              <a:rPr lang="pl-PL" dirty="0" err="1"/>
+              <a:t>GridSearchCV</a:t>
+            </a:r>
+            <a:r>
+              <a:rPr lang="pl-PL" dirty="0"/>
+              <a:t>, oba algorytmy dokonały skoku i stały się porównywalne do Regresji Logistycznej.</a:t>
+            </a:r>
+          </a:p>
+          <a:p>
+            <a:r>
+              <a:rPr lang="pl-PL" dirty="0"/>
+              <a:t>Regresja Logistyczna zachowała się zupełnie inaczej. Jej wyniki są niemal równe przed i po optymalizacji. Oznacza to, że ten algorytm już na domyślnych ustawieniach świetnie zrozumiał problem (wysokie ROC i PR). Optymalizacja w jej przypadku nie polegała na nauce od nowa, lecz na zmodyfikowaniu modelu, by przestał generować fałszywe alarmy. Drobny spadek na wykresie PR AUC po optymalizacji to właśnie koszt tej modyfikacji.</a:t>
+            </a:r>
+          </a:p>
+          <a:p>
+            <a:endParaRPr lang="pl-PL" dirty="0"/>
+          </a:p>
+        </p:txBody>
+      </p:sp>
+      <p:pic>
+        <p:nvPicPr>
+          <p:cNvPr id="5" name="Obraz 4">
+            <a:extLst>
+              <a:ext uri="{FF2B5EF4-FFF2-40B4-BE49-F238E27FC236}">
+                <a16:creationId xmlns:a16="http://schemas.microsoft.com/office/drawing/2014/main" id="{5F8D0E8E-4A53-A678-9775-C414F4565262}"/>
+              </a:ext>
+            </a:extLst>
+          </p:cNvPr>
+          <p:cNvPicPr>
+            <a:picLocks noChangeAspect="1"/>
+          </p:cNvPicPr>
+          <p:nvPr/>
+        </p:nvPicPr>
+        <p:blipFill>
+          <a:blip r:embed="rId2"/>
+          <a:stretch>
+            <a:fillRect/>
+          </a:stretch>
+        </p:blipFill>
+        <p:spPr>
+          <a:xfrm>
+            <a:off x="6180083" y="328448"/>
+            <a:ext cx="5788572" cy="3234559"/>
+          </a:xfrm>
+          <a:prstGeom prst="rect">
+            <a:avLst/>
+          </a:prstGeom>
+        </p:spPr>
+      </p:pic>
+      <p:pic>
+        <p:nvPicPr>
+          <p:cNvPr id="7" name="Obraz 6">
+            <a:extLst>
+              <a:ext uri="{FF2B5EF4-FFF2-40B4-BE49-F238E27FC236}">
+                <a16:creationId xmlns:a16="http://schemas.microsoft.com/office/drawing/2014/main" id="{C8E15277-FFAA-DE04-7C34-63811FDE01EF}"/>
+              </a:ext>
+            </a:extLst>
+          </p:cNvPr>
+          <p:cNvPicPr>
+            <a:picLocks noChangeAspect="1"/>
+          </p:cNvPicPr>
+          <p:nvPr/>
+        </p:nvPicPr>
+        <p:blipFill>
+          <a:blip r:embed="rId3"/>
+          <a:stretch>
+            <a:fillRect/>
+          </a:stretch>
+        </p:blipFill>
+        <p:spPr>
+          <a:xfrm>
+            <a:off x="6180083" y="3342290"/>
+            <a:ext cx="5788572" cy="3318642"/>
+          </a:xfrm>
+          <a:prstGeom prst="rect">
+            <a:avLst/>
+          </a:prstGeom>
+        </p:spPr>
+      </p:pic>
     </p:spTree>
     <p:extLst>
       <p:ext uri="{BB962C8B-B14F-4D97-AF65-F5344CB8AC3E}">
-        <p14:creationId xmlns:p14="http://schemas.microsoft.com/office/powerpoint/2010/main" val="916436233"/>
+        <p14:creationId xmlns:p14="http://schemas.microsoft.com/office/powerpoint/2010/main" val="599872881"/>
       </p:ext>
     </p:extLst>
   </p:cSld>
@@ -7353,6 +7526,262 @@
     <p:extLst>
       <p:ext uri="{BB962C8B-B14F-4D97-AF65-F5344CB8AC3E}">
         <p14:creationId xmlns:p14="http://schemas.microsoft.com/office/powerpoint/2010/main" val="4047153579"/>
+      </p:ext>
+    </p:extLst>
+  </p:cSld>
+  <p:clrMapOvr>
+    <a:masterClrMapping/>
+  </p:clrMapOvr>
+</p:sld>
+</file>
+
+<file path=ppt/slides/slide30.xml><?xml version="1.0" encoding="utf-8"?>
+<p:sld xmlns:a="http://schemas.openxmlformats.org/drawingml/2006/main" xmlns:r="http://schemas.openxmlformats.org/officeDocument/2006/relationships" xmlns:p="http://schemas.openxmlformats.org/presentationml/2006/main">
+  <p:cSld>
+    <p:spTree>
+      <p:nvGrpSpPr>
+        <p:cNvPr id="1" name=""/>
+        <p:cNvGrpSpPr/>
+        <p:nvPr/>
+      </p:nvGrpSpPr>
+      <p:grpSpPr>
+        <a:xfrm>
+          <a:off x="0" y="0"/>
+          <a:ext cx="0" cy="0"/>
+          <a:chOff x="0" y="0"/>
+          <a:chExt cx="0" cy="0"/>
+        </a:xfrm>
+      </p:grpSpPr>
+      <p:sp>
+        <p:nvSpPr>
+          <p:cNvPr id="2" name="Tytuł 1">
+            <a:extLst>
+              <a:ext uri="{FF2B5EF4-FFF2-40B4-BE49-F238E27FC236}">
+                <a16:creationId xmlns:a16="http://schemas.microsoft.com/office/drawing/2014/main" id="{4E8561CF-45D5-9A39-7362-1DE61FFD5D7A}"/>
+              </a:ext>
+            </a:extLst>
+          </p:cNvPr>
+          <p:cNvSpPr>
+            <a:spLocks noGrp="1"/>
+          </p:cNvSpPr>
+          <p:nvPr>
+            <p:ph type="title"/>
+          </p:nvPr>
+        </p:nvSpPr>
+        <p:spPr/>
+        <p:txBody>
+          <a:bodyPr/>
+          <a:lstStyle/>
+          <a:p>
+            <a:r>
+              <a:rPr lang="pl-PL" dirty="0" err="1"/>
+              <a:t>Podsummowanie</a:t>
+            </a:r>
+            <a:endParaRPr lang="pl-PL" dirty="0"/>
+          </a:p>
+        </p:txBody>
+      </p:sp>
+      <p:sp>
+        <p:nvSpPr>
+          <p:cNvPr id="3" name="Symbol zastępczy zawartości 2">
+            <a:extLst>
+              <a:ext uri="{FF2B5EF4-FFF2-40B4-BE49-F238E27FC236}">
+                <a16:creationId xmlns:a16="http://schemas.microsoft.com/office/drawing/2014/main" id="{12255C6C-7F73-B6DF-6152-3DC196DF6522}"/>
+              </a:ext>
+            </a:extLst>
+          </p:cNvPr>
+          <p:cNvSpPr>
+            <a:spLocks noGrp="1"/>
+          </p:cNvSpPr>
+          <p:nvPr>
+            <p:ph idx="1"/>
+          </p:nvPr>
+        </p:nvSpPr>
+        <p:spPr/>
+        <p:txBody>
+          <a:bodyPr>
+            <a:normAutofit lnSpcReduction="10000"/>
+          </a:bodyPr>
+          <a:lstStyle/>
+          <a:p>
+            <a:r>
+              <a:rPr lang="pl-PL" dirty="0"/>
+              <a:t>Dla zbioru „</a:t>
+            </a:r>
+            <a:r>
+              <a:rPr lang="pl-PL" dirty="0" err="1"/>
+              <a:t>Stroke</a:t>
+            </a:r>
+            <a:r>
+              <a:rPr lang="pl-PL" dirty="0"/>
+              <a:t> </a:t>
+            </a:r>
+            <a:r>
+              <a:rPr lang="pl-PL" dirty="0" err="1"/>
+              <a:t>Prediction</a:t>
+            </a:r>
+            <a:r>
+              <a:rPr lang="pl-PL" dirty="0"/>
+              <a:t> </a:t>
+            </a:r>
+            <a:r>
+              <a:rPr lang="pl-PL" dirty="0" err="1"/>
+              <a:t>Dataset</a:t>
+            </a:r>
+            <a:r>
+              <a:rPr lang="pl-PL" dirty="0"/>
+              <a:t>” najlepszym modelem zdecydowanie jest Regresja Logistyczna. Miała ona najwyższy Zysk Biznesowy, więc była najbardziej opłacalna. </a:t>
+            </a:r>
+          </a:p>
+          <a:p>
+            <a:r>
+              <a:rPr lang="pl-PL" dirty="0"/>
+              <a:t>W przypadku ROC AUC i PR AUC również model miał minimalną przewagę nad pozostałymi</a:t>
+            </a:r>
+          </a:p>
+          <a:p>
+            <a:r>
+              <a:rPr lang="pl-PL" dirty="0"/>
+              <a:t>Tylko dla F2-Score Regresja Logistyczna przegrała z Drzewem decyzyjnym, ponieważ F2-Score opiera się tylko na wyłapywaniu zawałów, nie zwracając uwagi na fałszywe alarmy </a:t>
+            </a:r>
+          </a:p>
+          <a:p>
+            <a:r>
+              <a:rPr lang="pl-PL" dirty="0"/>
+              <a:t>Gdybyśmy skupiali się wyłącznie na ocaleniu jak największej liczby chorych, nie patrząc na koszty badań i zaufanie do naszej aplikacji, wtedy Drzewo Decyzyjne byłoby lepszym rozwiązaniem</a:t>
+            </a:r>
+          </a:p>
+          <a:p>
+            <a:endParaRPr lang="pl-PL" dirty="0"/>
+          </a:p>
+        </p:txBody>
+      </p:sp>
+    </p:spTree>
+    <p:extLst>
+      <p:ext uri="{BB962C8B-B14F-4D97-AF65-F5344CB8AC3E}">
+        <p14:creationId xmlns:p14="http://schemas.microsoft.com/office/powerpoint/2010/main" val="4023781513"/>
+      </p:ext>
+    </p:extLst>
+  </p:cSld>
+  <p:clrMapOvr>
+    <a:masterClrMapping/>
+  </p:clrMapOvr>
+</p:sld>
+</file>
+
+<file path=ppt/slides/slide31.xml><?xml version="1.0" encoding="utf-8"?>
+<p:sld xmlns:a="http://schemas.openxmlformats.org/drawingml/2006/main" xmlns:r="http://schemas.openxmlformats.org/officeDocument/2006/relationships" xmlns:p="http://schemas.openxmlformats.org/presentationml/2006/main">
+  <p:cSld>
+    <p:spTree>
+      <p:nvGrpSpPr>
+        <p:cNvPr id="1" name=""/>
+        <p:cNvGrpSpPr/>
+        <p:nvPr/>
+      </p:nvGrpSpPr>
+      <p:grpSpPr>
+        <a:xfrm>
+          <a:off x="0" y="0"/>
+          <a:ext cx="0" cy="0"/>
+          <a:chOff x="0" y="0"/>
+          <a:chExt cx="0" cy="0"/>
+        </a:xfrm>
+      </p:grpSpPr>
+      <p:sp>
+        <p:nvSpPr>
+          <p:cNvPr id="2" name="Tytuł 1">
+            <a:extLst>
+              <a:ext uri="{FF2B5EF4-FFF2-40B4-BE49-F238E27FC236}">
+                <a16:creationId xmlns:a16="http://schemas.microsoft.com/office/drawing/2014/main" id="{EB34EFEF-37A9-DB75-FC29-22E6183FD802}"/>
+              </a:ext>
+            </a:extLst>
+          </p:cNvPr>
+          <p:cNvSpPr>
+            <a:spLocks noGrp="1"/>
+          </p:cNvSpPr>
+          <p:nvPr>
+            <p:ph type="title"/>
+          </p:nvPr>
+        </p:nvSpPr>
+        <p:spPr/>
+        <p:txBody>
+          <a:bodyPr/>
+          <a:lstStyle/>
+          <a:p>
+            <a:r>
+              <a:rPr lang="pl-PL" dirty="0"/>
+              <a:t>Podział prac</a:t>
+            </a:r>
+          </a:p>
+        </p:txBody>
+      </p:sp>
+      <p:sp>
+        <p:nvSpPr>
+          <p:cNvPr id="3" name="Symbol zastępczy zawartości 2">
+            <a:extLst>
+              <a:ext uri="{FF2B5EF4-FFF2-40B4-BE49-F238E27FC236}">
+                <a16:creationId xmlns:a16="http://schemas.microsoft.com/office/drawing/2014/main" id="{B6BADEC5-2F02-12F7-EF39-2DF2BCAB6CC7}"/>
+              </a:ext>
+            </a:extLst>
+          </p:cNvPr>
+          <p:cNvSpPr>
+            <a:spLocks noGrp="1"/>
+          </p:cNvSpPr>
+          <p:nvPr>
+            <p:ph idx="1"/>
+          </p:nvPr>
+        </p:nvSpPr>
+        <p:spPr/>
+        <p:txBody>
+          <a:bodyPr>
+            <a:normAutofit/>
+          </a:bodyPr>
+          <a:lstStyle/>
+          <a:p>
+            <a:r>
+              <a:rPr lang="pl-PL" sz="2400" dirty="0"/>
+              <a:t>Czesław Komenda – Regresja Logistyczna, prezentacja, interpretacja wyników</a:t>
+            </a:r>
+          </a:p>
+          <a:p>
+            <a:endParaRPr lang="pl-PL" sz="2400" dirty="0"/>
+          </a:p>
+          <a:p>
+            <a:r>
+              <a:rPr lang="pl-PL" sz="2400" dirty="0"/>
+              <a:t>Michał </a:t>
+            </a:r>
+            <a:r>
+              <a:rPr lang="pl-PL" sz="2400" dirty="0" err="1"/>
+              <a:t>Iwanejko</a:t>
+            </a:r>
+            <a:r>
+              <a:rPr lang="pl-PL" sz="2400" dirty="0"/>
+              <a:t> – Drzewo decyzyjne, analiza i </a:t>
+            </a:r>
+            <a:r>
+              <a:rPr lang="pl-PL" sz="2400" dirty="0" err="1"/>
+              <a:t>preprocesing</a:t>
+            </a:r>
+            <a:r>
+              <a:rPr lang="pl-PL" sz="2400" dirty="0"/>
+              <a:t> zbioru danych</a:t>
+            </a:r>
+          </a:p>
+          <a:p>
+            <a:endParaRPr lang="pl-PL" sz="2400" dirty="0"/>
+          </a:p>
+          <a:p>
+            <a:r>
+              <a:rPr lang="pl-PL" sz="2400" dirty="0"/>
+              <a:t>Ignacy Rusiecki – SVM, wybór i uzasadnienie miar klasyfikacji</a:t>
+            </a:r>
+          </a:p>
+        </p:txBody>
+      </p:sp>
+    </p:spTree>
+    <p:extLst>
+      <p:ext uri="{BB962C8B-B14F-4D97-AF65-F5344CB8AC3E}">
+        <p14:creationId xmlns:p14="http://schemas.microsoft.com/office/powerpoint/2010/main" val="916436233"/>
       </p:ext>
     </p:extLst>
   </p:cSld>

--- a/Stroke.pptx
+++ b/Stroke.pptx
@@ -134,6 +134,11 @@
       </a:defRPr>
     </a:lvl9pPr>
   </p:defaultTextStyle>
+  <p:extLst>
+    <p:ext uri="{EFAFB233-063F-42B5-8137-9DF3F51BA10A}">
+      <p15:sldGuideLst xmlns:p15="http://schemas.microsoft.com/office/powerpoint/2012/main"/>
+    </p:ext>
+  </p:extLst>
 </p:presentation>
 </file>
 
@@ -306,7 +311,7 @@
           <a:p>
             <a:fld id="{E232D418-9E88-7943-90B6-0440B62E84A8}" type="datetimeFigureOut">
               <a:rPr lang="pl-PL" smtClean="0"/>
-              <a:t>11.05.2026</a:t>
+              <a:t>14.05.2026</a:t>
             </a:fld>
             <a:endParaRPr lang="pl-PL"/>
           </a:p>
@@ -636,7 +641,7 @@
           <a:p>
             <a:fld id="{E232D418-9E88-7943-90B6-0440B62E84A8}" type="datetimeFigureOut">
               <a:rPr lang="pl-PL" smtClean="0"/>
-              <a:t>11.05.2026</a:t>
+              <a:t>14.05.2026</a:t>
             </a:fld>
             <a:endParaRPr lang="pl-PL"/>
           </a:p>
@@ -816,7 +821,7 @@
           <a:p>
             <a:fld id="{E232D418-9E88-7943-90B6-0440B62E84A8}" type="datetimeFigureOut">
               <a:rPr lang="pl-PL" smtClean="0"/>
-              <a:t>11.05.2026</a:t>
+              <a:t>14.05.2026</a:t>
             </a:fld>
             <a:endParaRPr lang="pl-PL"/>
           </a:p>
@@ -986,7 +991,7 @@
           <a:p>
             <a:fld id="{E232D418-9E88-7943-90B6-0440B62E84A8}" type="datetimeFigureOut">
               <a:rPr lang="pl-PL" smtClean="0"/>
-              <a:t>11.05.2026</a:t>
+              <a:t>14.05.2026</a:t>
             </a:fld>
             <a:endParaRPr lang="pl-PL"/>
           </a:p>
@@ -1263,7 +1268,7 @@
           <a:p>
             <a:fld id="{E232D418-9E88-7943-90B6-0440B62E84A8}" type="datetimeFigureOut">
               <a:rPr lang="pl-PL" smtClean="0"/>
-              <a:t>11.05.2026</a:t>
+              <a:t>14.05.2026</a:t>
             </a:fld>
             <a:endParaRPr lang="pl-PL"/>
           </a:p>
@@ -1657,7 +1662,7 @@
           <a:p>
             <a:fld id="{E232D418-9E88-7943-90B6-0440B62E84A8}" type="datetimeFigureOut">
               <a:rPr lang="pl-PL" smtClean="0"/>
-              <a:t>11.05.2026</a:t>
+              <a:t>14.05.2026</a:t>
             </a:fld>
             <a:endParaRPr lang="pl-PL"/>
           </a:p>
@@ -2134,7 +2139,7 @@
           <a:p>
             <a:fld id="{E232D418-9E88-7943-90B6-0440B62E84A8}" type="datetimeFigureOut">
               <a:rPr lang="pl-PL" smtClean="0"/>
-              <a:t>11.05.2026</a:t>
+              <a:t>14.05.2026</a:t>
             </a:fld>
             <a:endParaRPr lang="pl-PL"/>
           </a:p>
@@ -2252,7 +2257,7 @@
           <a:p>
             <a:fld id="{E232D418-9E88-7943-90B6-0440B62E84A8}" type="datetimeFigureOut">
               <a:rPr lang="pl-PL" smtClean="0"/>
-              <a:t>11.05.2026</a:t>
+              <a:t>14.05.2026</a:t>
             </a:fld>
             <a:endParaRPr lang="pl-PL"/>
           </a:p>
@@ -2347,7 +2352,7 @@
           <a:p>
             <a:fld id="{E232D418-9E88-7943-90B6-0440B62E84A8}" type="datetimeFigureOut">
               <a:rPr lang="pl-PL" smtClean="0"/>
-              <a:t>11.05.2026</a:t>
+              <a:t>14.05.2026</a:t>
             </a:fld>
             <a:endParaRPr lang="pl-PL"/>
           </a:p>
@@ -2693,7 +2698,7 @@
           <a:p>
             <a:fld id="{E232D418-9E88-7943-90B6-0440B62E84A8}" type="datetimeFigureOut">
               <a:rPr lang="pl-PL" smtClean="0"/>
-              <a:t>11.05.2026</a:t>
+              <a:t>14.05.2026</a:t>
             </a:fld>
             <a:endParaRPr lang="pl-PL"/>
           </a:p>
@@ -3081,7 +3086,7 @@
           <a:p>
             <a:fld id="{E232D418-9E88-7943-90B6-0440B62E84A8}" type="datetimeFigureOut">
               <a:rPr lang="pl-PL" smtClean="0"/>
-              <a:t>11.05.2026</a:t>
+              <a:t>14.05.2026</a:t>
             </a:fld>
             <a:endParaRPr lang="pl-PL"/>
           </a:p>
@@ -3359,7 +3364,7 @@
           <a:p>
             <a:fld id="{E232D418-9E88-7943-90B6-0440B62E84A8}" type="datetimeFigureOut">
               <a:rPr lang="pl-PL" smtClean="0"/>
-              <a:t>11.05.2026</a:t>
+              <a:t>14.05.2026</a:t>
             </a:fld>
             <a:endParaRPr lang="pl-PL"/>
           </a:p>
@@ -6510,7 +6515,9 @@
           </a:xfrm>
         </p:spPr>
         <p:txBody>
-          <a:bodyPr/>
+          <a:bodyPr>
+            <a:normAutofit lnSpcReduction="10000"/>
+          </a:bodyPr>
           <a:lstStyle/>
           <a:p>
             <a:r>
@@ -6574,7 +6581,7 @@
           <a:p>
             <a:r>
               <a:rPr lang="pl-PL" dirty="0"/>
-              <a:t>Gamma – zasięg wpływu danych (dotyczy </a:t>
+              <a:t>Gamma – zasięg wpływu pojedynczego przykładu(dotyczy </a:t>
             </a:r>
             <a:r>
               <a:rPr lang="pl-PL" dirty="0" err="1"/>
@@ -6610,7 +6617,15 @@
             </a:r>
             <a:r>
               <a:rPr lang="pl-PL" dirty="0"/>
-              <a:t> – model zwraca uwagę na klasę z większą wagą.</a:t>
+              <a:t> – przy „</a:t>
+            </a:r>
+            <a:r>
+              <a:rPr lang="pl-PL" dirty="0" err="1"/>
+              <a:t>balanced</a:t>
+            </a:r>
+            <a:r>
+              <a:rPr lang="pl-PL" dirty="0"/>
+              <a:t>” model nadaje klasie mniejszościowej taką wagę, by liczyła się tak jak większościowa.</a:t>
             </a:r>
           </a:p>
         </p:txBody>
@@ -6861,15 +6876,15 @@
           <a:p>
             <a:r>
               <a:rPr lang="pl-PL" dirty="0"/>
-              <a:t>Zysk biznesowy – 0.25 mówi, że model zaryzykował, wskazał bardzo mało osób i zdobył prawdopodobnie </a:t>
+              <a:t>Zysk biznesowy – 0.25 mówi, że model zaryzykował, wskazał bardzo mało osób i prawdopodobnie </a:t>
             </a:r>
             <a:r>
               <a:rPr lang="pl-PL" b="1" dirty="0"/>
-              <a:t>1 punkt za trafienie (1 TP) oraz stracił 0.75 punktu za 3 fałszywe alarmy (3 FP)</a:t>
-            </a:r>
-            <a:r>
-              <a:rPr lang="pl-PL" dirty="0"/>
-              <a:t>.Przeoczył przy tym niemal wszystkich chorych pacjentów. Działa ledwie zauważalnie lepiej niż model, który milczy całkowicie (zysk 0.00).</a:t>
+              <a:t>5 punkt za trafienie (1 TP) oraz stracił 4,75 punktu za 19 fałszywych alarmów (3 FP)</a:t>
+            </a:r>
+            <a:r>
+              <a:rPr lang="pl-PL" dirty="0"/>
+              <a:t>.Przeoczył przy tym 90% pacjentów. Działa ledwie zauważalnie lepiej niż model, który milczy całkowicie (zysk 0.00).</a:t>
             </a:r>
           </a:p>
           <a:p>

--- a/Stroke.pptx
+++ b/Stroke.pptx
@@ -5611,7 +5611,7 @@
             </a:r>
             <a:r>
               <a:rPr lang="pl-PL" dirty="0" err="1"/>
-              <a:t>balaced</a:t>
+              <a:t>balanced</a:t>
             </a:r>
             <a:r>
               <a:rPr lang="pl-PL" dirty="0"/>
@@ -7589,10 +7589,9 @@
           <a:lstStyle/>
           <a:p>
             <a:r>
-              <a:rPr lang="pl-PL" dirty="0" err="1"/>
-              <a:t>Podsummowanie</a:t>
-            </a:r>
-            <a:endParaRPr lang="pl-PL" dirty="0"/>
+              <a:rPr lang="pl-PL" dirty="0"/>
+              <a:t>Podsumowanie</a:t>
+            </a:r>
           </a:p>
         </p:txBody>
       </p:sp>
@@ -7612,10 +7611,15 @@
             <p:ph idx="1"/>
           </p:nvPr>
         </p:nvSpPr>
-        <p:spPr/>
+        <p:spPr>
+          <a:xfrm>
+            <a:off x="1371600" y="1981201"/>
+            <a:ext cx="9601200" cy="4325814"/>
+          </a:xfrm>
+        </p:spPr>
         <p:txBody>
           <a:bodyPr>
-            <a:normAutofit lnSpcReduction="10000"/>
+            <a:normAutofit/>
           </a:bodyPr>
           <a:lstStyle/>
           <a:p>
@@ -7657,7 +7661,7 @@
           <a:p>
             <a:r>
               <a:rPr lang="pl-PL" dirty="0"/>
-              <a:t>Tylko dla F2-Score Regresja Logistyczna przegrała z Drzewem decyzyjnym, ponieważ F2-Score opiera się tylko na wyłapywaniu zawałów, nie zwracając uwagi na fałszywe alarmy </a:t>
+              <a:t>Tylko w metryce F2-Score Regresja Logistyczna przegrała z Drzewem Decyzyjnym. Wynika to z faktu, że F2-Score kładzie podwójny nacisk na wyłapywanie zawałów (Czułość), łagodniej traktując fałszywe alarmy. Regresja Logistyczna osiągnęła niższe F2, ponieważ celowo poświęciła część Czułości na rzecz redukcji fałszywych alarmów, aby zmaksymalizować Zysk Biznesowy.</a:t>
             </a:r>
           </a:p>
           <a:p>

--- a/Stroke.pptx
+++ b/Stroke.pptx
@@ -5599,7 +5599,7 @@
           <a:p>
             <a:r>
               <a:rPr lang="pl-PL" dirty="0"/>
-              <a:t>Zysk biznesowy - aby uzyskać wynik -22.50, model musiał wskazać bardzo dużo fałszywych alarmów. Przewidywał, że niemal każdy pacjent ma udar. Wynika to z tego, że </a:t>
+              <a:t>Zysk biznesowy - aby uzyskać wynik -22.50, model musiał wskazać bardzo dużo fałszywych alarmów. Przewidywał, że niemal każdy pacjent ma udar, co potwierdza F2-Score. Wynika to z tego, że </a:t>
             </a:r>
             <a:r>
               <a:rPr lang="pl-PL" dirty="0" err="1"/>
